--- a/docs/pptx/entire/ritu-entire-ratio-by-bmi25.pptx
+++ b/docs/pptx/entire/ritu-entire-ratio-by-bmi25.pptx
@@ -2357,7 +2357,7 @@
           </p:nvSpPr>
           <p:spPr>
             <a:xfrm>
-              <a:off x="1087269" y="3891622"/>
+              <a:off x="1087269" y="3891623"/>
               <a:ext cx="7523614" cy="0"/>
             </a:xfrm>
             <a:custGeom>
@@ -3002,7 +3002,7 @@
                     <a:pt x="334620" y="2457895"/>
                   </a:lnTo>
                   <a:lnTo>
-                    <a:pt x="348005" y="2448295"/>
+                    <a:pt x="348005" y="2448296"/>
                   </a:lnTo>
                   <a:lnTo>
                     <a:pt x="361390" y="2438846"/>
@@ -3065,7 +3065,7 @@
                     <a:pt x="615702" y="2308011"/>
                   </a:lnTo>
                   <a:lnTo>
-                    <a:pt x="629087" y="2303133"/>
+                    <a:pt x="629087" y="2303134"/>
                   </a:lnTo>
                   <a:lnTo>
                     <a:pt x="642471" y="2298242"/>
@@ -3143,7 +3143,7 @@
                     <a:pt x="963707" y="2059736"/>
                   </a:lnTo>
                   <a:lnTo>
-                    <a:pt x="977092" y="2042378"/>
+                    <a:pt x="977092" y="2042379"/>
                   </a:lnTo>
                   <a:lnTo>
                     <a:pt x="990477" y="2024564"/>
@@ -3167,7 +3167,7 @@
                     <a:pt x="1070786" y="1909591"/>
                   </a:lnTo>
                   <a:lnTo>
-                    <a:pt x="1084171" y="1889452"/>
+                    <a:pt x="1084171" y="1889453"/>
                   </a:lnTo>
                   <a:lnTo>
                     <a:pt x="1097556" y="1869110"/>
@@ -3212,13 +3212,13 @@
                     <a:pt x="1271559" y="1597171"/>
                   </a:lnTo>
                   <a:lnTo>
-                    <a:pt x="1284943" y="1575469"/>
+                    <a:pt x="1284943" y="1575470"/>
                   </a:lnTo>
                   <a:lnTo>
                     <a:pt x="1298328" y="1553451"/>
                   </a:lnTo>
                   <a:lnTo>
-                    <a:pt x="1311713" y="1531109"/>
+                    <a:pt x="1311713" y="1531110"/>
                   </a:lnTo>
                   <a:lnTo>
                     <a:pt x="1325098" y="1508398"/>
@@ -3230,7 +3230,7 @@
                     <a:pt x="1351868" y="1461510"/>
                   </a:lnTo>
                   <a:lnTo>
-                    <a:pt x="1365252" y="1437127"/>
+                    <a:pt x="1365252" y="1437128"/>
                   </a:lnTo>
                   <a:lnTo>
                     <a:pt x="1378637" y="1412112"/>
@@ -3248,7 +3248,7 @@
                     <a:pt x="1432177" y="1304020"/>
                   </a:lnTo>
                   <a:lnTo>
-                    <a:pt x="1445561" y="1274703"/>
+                    <a:pt x="1445561" y="1274704"/>
                   </a:lnTo>
                   <a:lnTo>
                     <a:pt x="1458946" y="1244448"/>
@@ -3257,10 +3257,10 @@
                     <a:pt x="1472331" y="1213097"/>
                   </a:lnTo>
                   <a:lnTo>
-                    <a:pt x="1485716" y="1180508"/>
-                  </a:lnTo>
-                  <a:lnTo>
-                    <a:pt x="1499101" y="1146914"/>
+                    <a:pt x="1485716" y="1180509"/>
+                  </a:lnTo>
+                  <a:lnTo>
+                    <a:pt x="1499101" y="1146915"/>
                   </a:lnTo>
                   <a:lnTo>
                     <a:pt x="1512486" y="1112318"/>
@@ -3284,10 +3284,10 @@
                     <a:pt x="1592795" y="883707"/>
                   </a:lnTo>
                   <a:lnTo>
-                    <a:pt x="1606179" y="842617"/>
-                  </a:lnTo>
-                  <a:lnTo>
-                    <a:pt x="1619564" y="801019"/>
+                    <a:pt x="1606179" y="842618"/>
+                  </a:lnTo>
+                  <a:lnTo>
+                    <a:pt x="1619564" y="801020"/>
                   </a:lnTo>
                   <a:lnTo>
                     <a:pt x="1632949" y="759025"/>
@@ -3305,7 +3305,7 @@
                     <a:pt x="1686488" y="589521"/>
                   </a:lnTo>
                   <a:lnTo>
-                    <a:pt x="1699873" y="547564"/>
+                    <a:pt x="1699873" y="547565"/>
                   </a:lnTo>
                   <a:lnTo>
                     <a:pt x="1713258" y="506053"/>
@@ -3422,13 +3422,13 @@
                     <a:pt x="2208497" y="100392"/>
                   </a:lnTo>
                   <a:lnTo>
-                    <a:pt x="2221882" y="108411"/>
+                    <a:pt x="2221882" y="108412"/>
                   </a:lnTo>
                   <a:lnTo>
                     <a:pt x="2235267" y="115726"/>
                   </a:lnTo>
                   <a:lnTo>
-                    <a:pt x="2248651" y="122390"/>
+                    <a:pt x="2248651" y="122391"/>
                   </a:lnTo>
                   <a:lnTo>
                     <a:pt x="2262036" y="128381"/>
@@ -3467,13 +3467,13 @@
                     <a:pt x="2409269" y="140130"/>
                   </a:lnTo>
                   <a:lnTo>
-                    <a:pt x="2422654" y="136615"/>
+                    <a:pt x="2422654" y="136616"/>
                   </a:lnTo>
                   <a:lnTo>
                     <a:pt x="2436039" y="132558"/>
                   </a:lnTo>
                   <a:lnTo>
-                    <a:pt x="2449424" y="128056"/>
+                    <a:pt x="2449424" y="128057"/>
                   </a:lnTo>
                   <a:lnTo>
                     <a:pt x="2462809" y="123162"/>
@@ -3536,7 +3536,7 @@
                     <a:pt x="2717121" y="47225"/>
                   </a:lnTo>
                   <a:lnTo>
-                    <a:pt x="2730505" y="48881"/>
+                    <a:pt x="2730505" y="48880"/>
                   </a:lnTo>
                   <a:lnTo>
                     <a:pt x="2743890" y="51708"/>
@@ -3599,7 +3599,7 @@
                     <a:pt x="2998202" y="317357"/>
                   </a:lnTo>
                   <a:lnTo>
-                    <a:pt x="3011587" y="341486"/>
+                    <a:pt x="3011587" y="341487"/>
                   </a:lnTo>
                   <a:lnTo>
                     <a:pt x="3024972" y="366206"/>
@@ -3614,7 +3614,7 @@
                     <a:pt x="3065126" y="443414"/>
                   </a:lnTo>
                   <a:lnTo>
-                    <a:pt x="3078511" y="469825"/>
+                    <a:pt x="3078511" y="469826"/>
                   </a:lnTo>
                   <a:lnTo>
                     <a:pt x="3091896" y="496420"/>
@@ -3623,19 +3623,19 @@
                     <a:pt x="3105281" y="523129"/>
                   </a:lnTo>
                   <a:lnTo>
-                    <a:pt x="3118666" y="549849"/>
+                    <a:pt x="3118666" y="549850"/>
                   </a:lnTo>
                   <a:lnTo>
                     <a:pt x="3132050" y="576476"/>
                   </a:lnTo>
                   <a:lnTo>
-                    <a:pt x="3145435" y="602947"/>
+                    <a:pt x="3145435" y="602948"/>
                   </a:lnTo>
                   <a:lnTo>
                     <a:pt x="3158820" y="629204"/>
                   </a:lnTo>
                   <a:lnTo>
-                    <a:pt x="3172205" y="655144"/>
+                    <a:pt x="3172205" y="655145"/>
                   </a:lnTo>
                   <a:lnTo>
                     <a:pt x="3185590" y="680626"/>
@@ -3650,7 +3650,7 @@
                     <a:pt x="3225744" y="754315"/>
                   </a:lnTo>
                   <a:lnTo>
-                    <a:pt x="3239129" y="777693"/>
+                    <a:pt x="3239129" y="777694"/>
                   </a:lnTo>
                   <a:lnTo>
                     <a:pt x="3252514" y="800387"/>
@@ -3677,7 +3677,7 @@
                     <a:pt x="3346208" y="940556"/>
                   </a:lnTo>
                   <a:lnTo>
-                    <a:pt x="3359593" y="957969"/>
+                    <a:pt x="3359593" y="957970"/>
                   </a:lnTo>
                   <a:lnTo>
                     <a:pt x="3372977" y="974693"/>
@@ -3692,7 +3692,7 @@
                     <a:pt x="3413132" y="1022160"/>
                   </a:lnTo>
                   <a:lnTo>
-                    <a:pt x="3426517" y="1037183"/>
+                    <a:pt x="3426517" y="1037184"/>
                   </a:lnTo>
                   <a:lnTo>
                     <a:pt x="3439902" y="1051915"/>
@@ -3725,7 +3725,7 @@
                     <a:pt x="3560365" y="1185152"/>
                   </a:lnTo>
                   <a:lnTo>
-                    <a:pt x="3573750" y="1201426"/>
+                    <a:pt x="3573750" y="1201427"/>
                   </a:lnTo>
                   <a:lnTo>
                     <a:pt x="3587135" y="1218195"/>
@@ -3812,7 +3812,7 @@
                     <a:pt x="3948525" y="1855967"/>
                   </a:lnTo>
                   <a:lnTo>
-                    <a:pt x="3961910" y="1880069"/>
+                    <a:pt x="3961910" y="1880070"/>
                   </a:lnTo>
                   <a:lnTo>
                     <a:pt x="3975295" y="1903706"/>
@@ -3821,13 +3821,13 @@
                     <a:pt x="3988680" y="1926821"/>
                   </a:lnTo>
                   <a:lnTo>
-                    <a:pt x="4002065" y="1949246"/>
+                    <a:pt x="4002065" y="1949247"/>
                   </a:lnTo>
                   <a:lnTo>
                     <a:pt x="4015449" y="1971124"/>
                   </a:lnTo>
                   <a:lnTo>
-                    <a:pt x="4028834" y="1992442"/>
+                    <a:pt x="4028834" y="1992443"/>
                   </a:lnTo>
                   <a:lnTo>
                     <a:pt x="4042219" y="2013193"/>
@@ -3899,7 +3899,7 @@
                     <a:pt x="4336685" y="2329289"/>
                   </a:lnTo>
                   <a:lnTo>
-                    <a:pt x="4350070" y="2338931"/>
+                    <a:pt x="4350070" y="2338932"/>
                   </a:lnTo>
                   <a:lnTo>
                     <a:pt x="4363455" y="2348327"/>
@@ -6102,7 +6102,7 @@
                     <a:pt x="334620" y="2457895"/>
                   </a:lnTo>
                   <a:lnTo>
-                    <a:pt x="348005" y="2448295"/>
+                    <a:pt x="348005" y="2448296"/>
                   </a:lnTo>
                   <a:lnTo>
                     <a:pt x="361390" y="2438846"/>
@@ -6165,7 +6165,7 @@
                     <a:pt x="615702" y="2308011"/>
                   </a:lnTo>
                   <a:lnTo>
-                    <a:pt x="629087" y="2303133"/>
+                    <a:pt x="629087" y="2303134"/>
                   </a:lnTo>
                   <a:lnTo>
                     <a:pt x="642471" y="2298242"/>
@@ -6243,7 +6243,7 @@
                     <a:pt x="963707" y="2059736"/>
                   </a:lnTo>
                   <a:lnTo>
-                    <a:pt x="977092" y="2042378"/>
+                    <a:pt x="977092" y="2042379"/>
                   </a:lnTo>
                   <a:lnTo>
                     <a:pt x="990477" y="2024564"/>
@@ -6267,7 +6267,7 @@
                     <a:pt x="1070786" y="1909591"/>
                   </a:lnTo>
                   <a:lnTo>
-                    <a:pt x="1084171" y="1889452"/>
+                    <a:pt x="1084171" y="1889453"/>
                   </a:lnTo>
                   <a:lnTo>
                     <a:pt x="1097556" y="1869110"/>
@@ -6312,13 +6312,13 @@
                     <a:pt x="1271559" y="1597171"/>
                   </a:lnTo>
                   <a:lnTo>
-                    <a:pt x="1284943" y="1575469"/>
+                    <a:pt x="1284943" y="1575470"/>
                   </a:lnTo>
                   <a:lnTo>
                     <a:pt x="1298328" y="1553451"/>
                   </a:lnTo>
                   <a:lnTo>
-                    <a:pt x="1311713" y="1531109"/>
+                    <a:pt x="1311713" y="1531110"/>
                   </a:lnTo>
                   <a:lnTo>
                     <a:pt x="1325098" y="1508398"/>
@@ -6330,7 +6330,7 @@
                     <a:pt x="1351868" y="1461510"/>
                   </a:lnTo>
                   <a:lnTo>
-                    <a:pt x="1365252" y="1437127"/>
+                    <a:pt x="1365252" y="1437128"/>
                   </a:lnTo>
                   <a:lnTo>
                     <a:pt x="1378637" y="1412112"/>
@@ -6348,7 +6348,7 @@
                     <a:pt x="1432177" y="1304020"/>
                   </a:lnTo>
                   <a:lnTo>
-                    <a:pt x="1445561" y="1274703"/>
+                    <a:pt x="1445561" y="1274704"/>
                   </a:lnTo>
                   <a:lnTo>
                     <a:pt x="1458946" y="1244448"/>
@@ -6357,10 +6357,10 @@
                     <a:pt x="1472331" y="1213097"/>
                   </a:lnTo>
                   <a:lnTo>
-                    <a:pt x="1485716" y="1180508"/>
-                  </a:lnTo>
-                  <a:lnTo>
-                    <a:pt x="1499101" y="1146914"/>
+                    <a:pt x="1485716" y="1180509"/>
+                  </a:lnTo>
+                  <a:lnTo>
+                    <a:pt x="1499101" y="1146915"/>
                   </a:lnTo>
                   <a:lnTo>
                     <a:pt x="1512486" y="1112318"/>
@@ -6384,10 +6384,10 @@
                     <a:pt x="1592795" y="883707"/>
                   </a:lnTo>
                   <a:lnTo>
-                    <a:pt x="1606179" y="842617"/>
-                  </a:lnTo>
-                  <a:lnTo>
-                    <a:pt x="1619564" y="801019"/>
+                    <a:pt x="1606179" y="842618"/>
+                  </a:lnTo>
+                  <a:lnTo>
+                    <a:pt x="1619564" y="801020"/>
                   </a:lnTo>
                   <a:lnTo>
                     <a:pt x="1632949" y="759025"/>
@@ -6405,7 +6405,7 @@
                     <a:pt x="1686488" y="589521"/>
                   </a:lnTo>
                   <a:lnTo>
-                    <a:pt x="1699873" y="547564"/>
+                    <a:pt x="1699873" y="547565"/>
                   </a:lnTo>
                   <a:lnTo>
                     <a:pt x="1713258" y="506053"/>
@@ -6522,13 +6522,13 @@
                     <a:pt x="2208497" y="100392"/>
                   </a:lnTo>
                   <a:lnTo>
-                    <a:pt x="2221882" y="108411"/>
+                    <a:pt x="2221882" y="108412"/>
                   </a:lnTo>
                   <a:lnTo>
                     <a:pt x="2235267" y="115726"/>
                   </a:lnTo>
                   <a:lnTo>
-                    <a:pt x="2248651" y="122390"/>
+                    <a:pt x="2248651" y="122391"/>
                   </a:lnTo>
                   <a:lnTo>
                     <a:pt x="2262036" y="128381"/>
@@ -6567,13 +6567,13 @@
                     <a:pt x="2409269" y="140130"/>
                   </a:lnTo>
                   <a:lnTo>
-                    <a:pt x="2422654" y="136615"/>
+                    <a:pt x="2422654" y="136616"/>
                   </a:lnTo>
                   <a:lnTo>
                     <a:pt x="2436039" y="132558"/>
                   </a:lnTo>
                   <a:lnTo>
-                    <a:pt x="2449424" y="128056"/>
+                    <a:pt x="2449424" y="128057"/>
                   </a:lnTo>
                   <a:lnTo>
                     <a:pt x="2462809" y="123162"/>
@@ -6636,7 +6636,7 @@
                     <a:pt x="2717121" y="47225"/>
                   </a:lnTo>
                   <a:lnTo>
-                    <a:pt x="2730505" y="48881"/>
+                    <a:pt x="2730505" y="48880"/>
                   </a:lnTo>
                   <a:lnTo>
                     <a:pt x="2743890" y="51708"/>
@@ -6699,7 +6699,7 @@
                     <a:pt x="2998202" y="317357"/>
                   </a:lnTo>
                   <a:lnTo>
-                    <a:pt x="3011587" y="341486"/>
+                    <a:pt x="3011587" y="341487"/>
                   </a:lnTo>
                   <a:lnTo>
                     <a:pt x="3024972" y="366206"/>
@@ -6714,7 +6714,7 @@
                     <a:pt x="3065126" y="443414"/>
                   </a:lnTo>
                   <a:lnTo>
-                    <a:pt x="3078511" y="469825"/>
+                    <a:pt x="3078511" y="469826"/>
                   </a:lnTo>
                   <a:lnTo>
                     <a:pt x="3091896" y="496420"/>
@@ -6723,19 +6723,19 @@
                     <a:pt x="3105281" y="523129"/>
                   </a:lnTo>
                   <a:lnTo>
-                    <a:pt x="3118666" y="549849"/>
+                    <a:pt x="3118666" y="549850"/>
                   </a:lnTo>
                   <a:lnTo>
                     <a:pt x="3132050" y="576476"/>
                   </a:lnTo>
                   <a:lnTo>
-                    <a:pt x="3145435" y="602947"/>
+                    <a:pt x="3145435" y="602948"/>
                   </a:lnTo>
                   <a:lnTo>
                     <a:pt x="3158820" y="629204"/>
                   </a:lnTo>
                   <a:lnTo>
-                    <a:pt x="3172205" y="655144"/>
+                    <a:pt x="3172205" y="655145"/>
                   </a:lnTo>
                   <a:lnTo>
                     <a:pt x="3185590" y="680626"/>
@@ -6750,7 +6750,7 @@
                     <a:pt x="3225744" y="754315"/>
                   </a:lnTo>
                   <a:lnTo>
-                    <a:pt x="3239129" y="777693"/>
+                    <a:pt x="3239129" y="777694"/>
                   </a:lnTo>
                   <a:lnTo>
                     <a:pt x="3252514" y="800387"/>
@@ -6777,7 +6777,7 @@
                     <a:pt x="3346208" y="940556"/>
                   </a:lnTo>
                   <a:lnTo>
-                    <a:pt x="3359593" y="957969"/>
+                    <a:pt x="3359593" y="957970"/>
                   </a:lnTo>
                   <a:lnTo>
                     <a:pt x="3372977" y="974693"/>
@@ -6792,7 +6792,7 @@
                     <a:pt x="3413132" y="1022160"/>
                   </a:lnTo>
                   <a:lnTo>
-                    <a:pt x="3426517" y="1037183"/>
+                    <a:pt x="3426517" y="1037184"/>
                   </a:lnTo>
                   <a:lnTo>
                     <a:pt x="3439902" y="1051915"/>
@@ -6825,7 +6825,7 @@
                     <a:pt x="3560365" y="1185152"/>
                   </a:lnTo>
                   <a:lnTo>
-                    <a:pt x="3573750" y="1201426"/>
+                    <a:pt x="3573750" y="1201427"/>
                   </a:lnTo>
                   <a:lnTo>
                     <a:pt x="3587135" y="1218195"/>
@@ -6912,7 +6912,7 @@
                     <a:pt x="3948525" y="1855967"/>
                   </a:lnTo>
                   <a:lnTo>
-                    <a:pt x="3961910" y="1880069"/>
+                    <a:pt x="3961910" y="1880070"/>
                   </a:lnTo>
                   <a:lnTo>
                     <a:pt x="3975295" y="1903706"/>
@@ -6921,13 +6921,13 @@
                     <a:pt x="3988680" y="1926821"/>
                   </a:lnTo>
                   <a:lnTo>
-                    <a:pt x="4002065" y="1949246"/>
+                    <a:pt x="4002065" y="1949247"/>
                   </a:lnTo>
                   <a:lnTo>
                     <a:pt x="4015449" y="1971124"/>
                   </a:lnTo>
                   <a:lnTo>
-                    <a:pt x="4028834" y="1992442"/>
+                    <a:pt x="4028834" y="1992443"/>
                   </a:lnTo>
                   <a:lnTo>
                     <a:pt x="4042219" y="2013193"/>
@@ -6999,7 +6999,7 @@
                     <a:pt x="4336685" y="2329289"/>
                   </a:lnTo>
                   <a:lnTo>
-                    <a:pt x="4350070" y="2338931"/>
+                    <a:pt x="4350070" y="2338932"/>
                   </a:lnTo>
                   <a:lnTo>
                     <a:pt x="4363455" y="2348327"/>
@@ -7639,10 +7639,10 @@
                     <a:pt x="187387" y="2623606"/>
                   </a:lnTo>
                   <a:lnTo>
-                    <a:pt x="200772" y="2622713"/>
-                  </a:lnTo>
-                  <a:lnTo>
-                    <a:pt x="214157" y="2621823"/>
+                    <a:pt x="200772" y="2622712"/>
+                  </a:lnTo>
+                  <a:lnTo>
+                    <a:pt x="214157" y="2621822"/>
                   </a:lnTo>
                   <a:lnTo>
                     <a:pt x="227542" y="2620939"/>
@@ -7681,13 +7681,13 @@
                     <a:pt x="374775" y="2612234"/>
                   </a:lnTo>
                   <a:lnTo>
-                    <a:pt x="388160" y="2611563"/>
+                    <a:pt x="388160" y="2611562"/>
                   </a:lnTo>
                   <a:lnTo>
                     <a:pt x="401544" y="2610912"/>
                   </a:lnTo>
                   <a:lnTo>
-                    <a:pt x="414929" y="2610277"/>
+                    <a:pt x="414929" y="2610276"/>
                   </a:lnTo>
                   <a:lnTo>
                     <a:pt x="428314" y="2609655"/>
@@ -7696,7 +7696,7 @@
                     <a:pt x="441699" y="2609047"/>
                   </a:lnTo>
                   <a:lnTo>
-                    <a:pt x="455084" y="2608449"/>
+                    <a:pt x="455084" y="2608448"/>
                   </a:lnTo>
                   <a:lnTo>
                     <a:pt x="468469" y="2607854"/>
@@ -7753,7 +7753,7 @@
                     <a:pt x="696011" y="2593027"/>
                   </a:lnTo>
                   <a:lnTo>
-                    <a:pt x="709396" y="2591470"/>
+                    <a:pt x="709396" y="2591469"/>
                   </a:lnTo>
                   <a:lnTo>
                     <a:pt x="722780" y="2589777"/>
@@ -7792,16 +7792,16 @@
                     <a:pt x="870014" y="2561114"/>
                   </a:lnTo>
                   <a:lnTo>
-                    <a:pt x="883398" y="2557410"/>
+                    <a:pt x="883398" y="2557409"/>
                   </a:lnTo>
                   <a:lnTo>
                     <a:pt x="896783" y="2553528"/>
                   </a:lnTo>
                   <a:lnTo>
-                    <a:pt x="910168" y="2549469"/>
-                  </a:lnTo>
-                  <a:lnTo>
-                    <a:pt x="923553" y="2545169"/>
+                    <a:pt x="910168" y="2549468"/>
+                  </a:lnTo>
+                  <a:lnTo>
+                    <a:pt x="923553" y="2545168"/>
                   </a:lnTo>
                   <a:lnTo>
                     <a:pt x="936938" y="2540655"/>
@@ -7837,16 +7837,16 @@
                     <a:pt x="1070786" y="2484689"/>
                   </a:lnTo>
                   <a:lnTo>
-                    <a:pt x="1084171" y="2478044"/>
-                  </a:lnTo>
-                  <a:lnTo>
-                    <a:pt x="1097556" y="2471232"/>
-                  </a:lnTo>
-                  <a:lnTo>
-                    <a:pt x="1110941" y="2464281"/>
-                  </a:lnTo>
-                  <a:lnTo>
-                    <a:pt x="1124325" y="2457196"/>
+                    <a:pt x="1084171" y="2478043"/>
+                  </a:lnTo>
+                  <a:lnTo>
+                    <a:pt x="1097556" y="2471231"/>
+                  </a:lnTo>
+                  <a:lnTo>
+                    <a:pt x="1110941" y="2464280"/>
+                  </a:lnTo>
+                  <a:lnTo>
+                    <a:pt x="1124325" y="2457195"/>
                   </a:lnTo>
                   <a:lnTo>
                     <a:pt x="1137710" y="2449939"/>
@@ -7873,7 +7873,7 @@
                     <a:pt x="1231404" y="2396122"/>
                   </a:lnTo>
                   <a:lnTo>
-                    <a:pt x="1244789" y="2388102"/>
+                    <a:pt x="1244789" y="2388101"/>
                   </a:lnTo>
                   <a:lnTo>
                     <a:pt x="1258174" y="2380031"/>
@@ -7894,7 +7894,7 @@
                     <a:pt x="1325098" y="2339170"/>
                   </a:lnTo>
                   <a:lnTo>
-                    <a:pt x="1338483" y="2330933"/>
+                    <a:pt x="1338483" y="2330932"/>
                   </a:lnTo>
                   <a:lnTo>
                     <a:pt x="1351868" y="2322677"/>
@@ -7957,7 +7957,7 @@
                     <a:pt x="1606179" y="2154127"/>
                   </a:lnTo>
                   <a:lnTo>
-                    <a:pt x="1619564" y="2143568"/>
+                    <a:pt x="1619564" y="2143567"/>
                   </a:lnTo>
                   <a:lnTo>
                     <a:pt x="1632949" y="2132716"/>
@@ -7984,7 +7984,7 @@
                     <a:pt x="1726643" y="2046719"/>
                   </a:lnTo>
                   <a:lnTo>
-                    <a:pt x="1740028" y="2032743"/>
+                    <a:pt x="1740028" y="2032742"/>
                   </a:lnTo>
                   <a:lnTo>
                     <a:pt x="1753413" y="2018365"/>
@@ -8008,7 +8008,7 @@
                     <a:pt x="1833722" y="1922204"/>
                   </a:lnTo>
                   <a:lnTo>
-                    <a:pt x="1847106" y="1904525"/>
+                    <a:pt x="1847106" y="1904524"/>
                   </a:lnTo>
                   <a:lnTo>
                     <a:pt x="1860491" y="1886446"/>
@@ -8032,7 +8032,7 @@
                     <a:pt x="1940800" y="1769084"/>
                   </a:lnTo>
                   <a:lnTo>
-                    <a:pt x="1954185" y="1748202"/>
+                    <a:pt x="1954185" y="1748201"/>
                   </a:lnTo>
                   <a:lnTo>
                     <a:pt x="1967570" y="1727033"/>
@@ -8047,7 +8047,7 @@
                     <a:pt x="2007724" y="1661741"/>
                   </a:lnTo>
                   <a:lnTo>
-                    <a:pt x="2021109" y="1639498"/>
+                    <a:pt x="2021109" y="1639497"/>
                   </a:lnTo>
                   <a:lnTo>
                     <a:pt x="2034494" y="1617055"/>
@@ -8086,7 +8086,7 @@
                     <a:pt x="2181727" y="1361273"/>
                   </a:lnTo>
                   <a:lnTo>
-                    <a:pt x="2195112" y="1337644"/>
+                    <a:pt x="2195112" y="1337643"/>
                   </a:lnTo>
                   <a:lnTo>
                     <a:pt x="2208497" y="1313992"/>
@@ -8101,7 +8101,7 @@
                     <a:pt x="2248651" y="1242996"/>
                   </a:lnTo>
                   <a:lnTo>
-                    <a:pt x="2262036" y="1219329"/>
+                    <a:pt x="2262036" y="1219328"/>
                   </a:lnTo>
                   <a:lnTo>
                     <a:pt x="2275421" y="1195665"/>
@@ -8179,7 +8179,7 @@
                     <a:pt x="2596657" y="646861"/>
                   </a:lnTo>
                   <a:lnTo>
-                    <a:pt x="2610042" y="626596"/>
+                    <a:pt x="2610042" y="626595"/>
                   </a:lnTo>
                   <a:lnTo>
                     <a:pt x="2623427" y="606774"/>
@@ -8275,7 +8275,7 @@
                     <a:pt x="3024972" y="310554"/>
                   </a:lnTo>
                   <a:lnTo>
-                    <a:pt x="3038357" y="308237"/>
+                    <a:pt x="3038357" y="308236"/>
                   </a:lnTo>
                   <a:lnTo>
                     <a:pt x="3051741" y="305949"/>
@@ -8455,7 +8455,7 @@
                     <a:pt x="3828062" y="77096"/>
                   </a:lnTo>
                   <a:lnTo>
-                    <a:pt x="3841447" y="89389"/>
+                    <a:pt x="3841447" y="89388"/>
                   </a:lnTo>
                   <a:lnTo>
                     <a:pt x="3854831" y="102646"/>
@@ -8557,7 +8557,7 @@
                     <a:pt x="4283146" y="780162"/>
                   </a:lnTo>
                   <a:lnTo>
-                    <a:pt x="4296531" y="804288"/>
+                    <a:pt x="4296531" y="804287"/>
                   </a:lnTo>
                   <a:lnTo>
                     <a:pt x="4309916" y="828306"/>
@@ -8608,7 +8608,7 @@
                     <a:pt x="4510688" y="1154510"/>
                   </a:lnTo>
                   <a:lnTo>
-                    <a:pt x="4524073" y="1172873"/>
+                    <a:pt x="4524073" y="1172872"/>
                   </a:lnTo>
                   <a:lnTo>
                     <a:pt x="4537458" y="1190775"/>
@@ -8617,7 +8617,7 @@
                     <a:pt x="4550843" y="1208004"/>
                   </a:lnTo>
                   <a:lnTo>
-                    <a:pt x="4564228" y="1224737"/>
+                    <a:pt x="4564228" y="1224736"/>
                   </a:lnTo>
                   <a:lnTo>
                     <a:pt x="4577612" y="1241004"/>
@@ -8665,7 +8665,7 @@
                     <a:pt x="4765000" y="1422798"/>
                   </a:lnTo>
                   <a:lnTo>
-                    <a:pt x="4778385" y="1433681"/>
+                    <a:pt x="4778385" y="1433680"/>
                   </a:lnTo>
                   <a:lnTo>
                     <a:pt x="4791770" y="1444493"/>
@@ -8689,7 +8689,7 @@
                     <a:pt x="4872079" y="1509926"/>
                   </a:lnTo>
                   <a:lnTo>
-                    <a:pt x="4885464" y="1521301"/>
+                    <a:pt x="4885464" y="1521300"/>
                   </a:lnTo>
                   <a:lnTo>
                     <a:pt x="4898848" y="1532871"/>
@@ -8746,7 +8746,7 @@
                     <a:pt x="5126391" y="1779593"/>
                   </a:lnTo>
                   <a:lnTo>
-                    <a:pt x="5139775" y="1797111"/>
+                    <a:pt x="5139775" y="1797110"/>
                   </a:lnTo>
                   <a:lnTo>
                     <a:pt x="5153160" y="1814830"/>
@@ -8761,7 +8761,7 @@
                     <a:pt x="5193315" y="1869099"/>
                   </a:lnTo>
                   <a:lnTo>
-                    <a:pt x="5206700" y="1887477"/>
+                    <a:pt x="5206700" y="1887476"/>
                   </a:lnTo>
                   <a:lnTo>
                     <a:pt x="5220084" y="1905935"/>
@@ -8770,10 +8770,10 @@
                     <a:pt x="5233469" y="1924457"/>
                   </a:lnTo>
                   <a:lnTo>
-                    <a:pt x="5246854" y="1943010"/>
-                  </a:lnTo>
-                  <a:lnTo>
-                    <a:pt x="5260239" y="1961548"/>
+                    <a:pt x="5246854" y="1943009"/>
+                  </a:lnTo>
+                  <a:lnTo>
+                    <a:pt x="5260239" y="1961547"/>
                   </a:lnTo>
                   <a:lnTo>
                     <a:pt x="5273624" y="1980052"/>
@@ -8812,7 +8812,7 @@
                     <a:pt x="5420857" y="2172337"/>
                   </a:lnTo>
                   <a:lnTo>
-                    <a:pt x="5434242" y="2188141"/>
+                    <a:pt x="5434242" y="2188140"/>
                   </a:lnTo>
                   <a:lnTo>
                     <a:pt x="5447627" y="2203583"/>
@@ -8872,7 +8872,7 @@
                     <a:pt x="5688554" y="2405267"/>
                   </a:lnTo>
                   <a:lnTo>
-                    <a:pt x="5701938" y="2412202"/>
+                    <a:pt x="5701938" y="2412201"/>
                   </a:lnTo>
                   <a:lnTo>
                     <a:pt x="5715323" y="2418709"/>
@@ -8887,7 +8887,7 @@
                     <a:pt x="5755478" y="2435694"/>
                   </a:lnTo>
                   <a:lnTo>
-                    <a:pt x="5768863" y="2440629"/>
+                    <a:pt x="5768863" y="2440628"/>
                   </a:lnTo>
                   <a:lnTo>
                     <a:pt x="5782247" y="2445134"/>
@@ -8911,7 +8911,7 @@
                     <a:pt x="5862556" y="2465892"/>
                   </a:lnTo>
                   <a:lnTo>
-                    <a:pt x="5875941" y="2468430"/>
+                    <a:pt x="5875941" y="2468429"/>
                   </a:lnTo>
                   <a:lnTo>
                     <a:pt x="5889326" y="2470713"/>
@@ -8965,7 +8965,7 @@
                     <a:pt x="6103483" y="2494230"/>
                   </a:lnTo>
                   <a:lnTo>
-                    <a:pt x="6116868" y="2495725"/>
+                    <a:pt x="6116868" y="2495724"/>
                   </a:lnTo>
                   <a:lnTo>
                     <a:pt x="6130253" y="2497288"/>
@@ -8980,13 +8980,13 @@
                     <a:pt x="6170408" y="2502549"/>
                   </a:lnTo>
                   <a:lnTo>
-                    <a:pt x="6183792" y="2504482"/>
+                    <a:pt x="6183792" y="2504481"/>
                   </a:lnTo>
                   <a:lnTo>
                     <a:pt x="6197177" y="2506521"/>
                   </a:lnTo>
                   <a:lnTo>
-                    <a:pt x="6210562" y="2508675"/>
+                    <a:pt x="6210562" y="2508674"/>
                   </a:lnTo>
                   <a:lnTo>
                     <a:pt x="6223947" y="2510914"/>
@@ -9022,7 +9022,7 @@
                     <a:pt x="6357795" y="2537548"/>
                   </a:lnTo>
                   <a:lnTo>
-                    <a:pt x="6371180" y="2540466"/>
+                    <a:pt x="6371180" y="2540465"/>
                   </a:lnTo>
                   <a:lnTo>
                     <a:pt x="6384565" y="2543388"/>
@@ -9031,7 +9031,7 @@
                     <a:pt x="6397950" y="2546309"/>
                   </a:lnTo>
                   <a:lnTo>
-                    <a:pt x="6411335" y="2549218"/>
+                    <a:pt x="6411335" y="2549217"/>
                   </a:lnTo>
                   <a:lnTo>
                     <a:pt x="6424719" y="2552099"/>
@@ -9043,7 +9043,7 @@
                     <a:pt x="6451489" y="2557767"/>
                   </a:lnTo>
                   <a:lnTo>
-                    <a:pt x="6464874" y="2560530"/>
+                    <a:pt x="6464874" y="2560529"/>
                   </a:lnTo>
                   <a:lnTo>
                     <a:pt x="6478259" y="2563227"/>
@@ -9058,13 +9058,13 @@
                     <a:pt x="6518413" y="2570936"/>
                   </a:lnTo>
                   <a:lnTo>
-                    <a:pt x="6531798" y="2573339"/>
+                    <a:pt x="6531798" y="2573338"/>
                   </a:lnTo>
                   <a:lnTo>
                     <a:pt x="6545183" y="2575665"/>
                   </a:lnTo>
                   <a:lnTo>
-                    <a:pt x="6558568" y="2577915"/>
+                    <a:pt x="6558568" y="2577914"/>
                   </a:lnTo>
                   <a:lnTo>
                     <a:pt x="6571953" y="2580062"/>
@@ -9079,7 +9079,7 @@
                     <a:pt x="6612107" y="2585964"/>
                   </a:lnTo>
                   <a:lnTo>
-                    <a:pt x="6625492" y="2587748"/>
+                    <a:pt x="6625492" y="2587747"/>
                   </a:lnTo>
                   <a:lnTo>
                     <a:pt x="6638877" y="2589437"/>
@@ -9121,7 +9121,7 @@
                     <a:pt x="6799495" y="2604434"/>
                   </a:lnTo>
                   <a:lnTo>
-                    <a:pt x="6812880" y="2605388"/>
+                    <a:pt x="6812880" y="2605387"/>
                   </a:lnTo>
                   <a:lnTo>
                     <a:pt x="6826264" y="2606321"/>
@@ -10742,10 +10742,10 @@
                     <a:pt x="187387" y="2623606"/>
                   </a:lnTo>
                   <a:lnTo>
-                    <a:pt x="200772" y="2622713"/>
-                  </a:lnTo>
-                  <a:lnTo>
-                    <a:pt x="214157" y="2621823"/>
+                    <a:pt x="200772" y="2622712"/>
+                  </a:lnTo>
+                  <a:lnTo>
+                    <a:pt x="214157" y="2621822"/>
                   </a:lnTo>
                   <a:lnTo>
                     <a:pt x="227542" y="2620939"/>
@@ -10784,13 +10784,13 @@
                     <a:pt x="374775" y="2612234"/>
                   </a:lnTo>
                   <a:lnTo>
-                    <a:pt x="388160" y="2611563"/>
+                    <a:pt x="388160" y="2611562"/>
                   </a:lnTo>
                   <a:lnTo>
                     <a:pt x="401544" y="2610912"/>
                   </a:lnTo>
                   <a:lnTo>
-                    <a:pt x="414929" y="2610277"/>
+                    <a:pt x="414929" y="2610276"/>
                   </a:lnTo>
                   <a:lnTo>
                     <a:pt x="428314" y="2609655"/>
@@ -10799,7 +10799,7 @@
                     <a:pt x="441699" y="2609047"/>
                   </a:lnTo>
                   <a:lnTo>
-                    <a:pt x="455084" y="2608449"/>
+                    <a:pt x="455084" y="2608448"/>
                   </a:lnTo>
                   <a:lnTo>
                     <a:pt x="468469" y="2607854"/>
@@ -10856,7 +10856,7 @@
                     <a:pt x="696011" y="2593027"/>
                   </a:lnTo>
                   <a:lnTo>
-                    <a:pt x="709396" y="2591470"/>
+                    <a:pt x="709396" y="2591469"/>
                   </a:lnTo>
                   <a:lnTo>
                     <a:pt x="722780" y="2589777"/>
@@ -10895,16 +10895,16 @@
                     <a:pt x="870014" y="2561114"/>
                   </a:lnTo>
                   <a:lnTo>
-                    <a:pt x="883398" y="2557410"/>
+                    <a:pt x="883398" y="2557409"/>
                   </a:lnTo>
                   <a:lnTo>
                     <a:pt x="896783" y="2553528"/>
                   </a:lnTo>
                   <a:lnTo>
-                    <a:pt x="910168" y="2549469"/>
-                  </a:lnTo>
-                  <a:lnTo>
-                    <a:pt x="923553" y="2545169"/>
+                    <a:pt x="910168" y="2549468"/>
+                  </a:lnTo>
+                  <a:lnTo>
+                    <a:pt x="923553" y="2545168"/>
                   </a:lnTo>
                   <a:lnTo>
                     <a:pt x="936938" y="2540655"/>
@@ -10940,16 +10940,16 @@
                     <a:pt x="1070786" y="2484689"/>
                   </a:lnTo>
                   <a:lnTo>
-                    <a:pt x="1084171" y="2478044"/>
-                  </a:lnTo>
-                  <a:lnTo>
-                    <a:pt x="1097556" y="2471232"/>
-                  </a:lnTo>
-                  <a:lnTo>
-                    <a:pt x="1110941" y="2464281"/>
-                  </a:lnTo>
-                  <a:lnTo>
-                    <a:pt x="1124325" y="2457196"/>
+                    <a:pt x="1084171" y="2478043"/>
+                  </a:lnTo>
+                  <a:lnTo>
+                    <a:pt x="1097556" y="2471231"/>
+                  </a:lnTo>
+                  <a:lnTo>
+                    <a:pt x="1110941" y="2464280"/>
+                  </a:lnTo>
+                  <a:lnTo>
+                    <a:pt x="1124325" y="2457195"/>
                   </a:lnTo>
                   <a:lnTo>
                     <a:pt x="1137710" y="2449939"/>
@@ -10976,7 +10976,7 @@
                     <a:pt x="1231404" y="2396122"/>
                   </a:lnTo>
                   <a:lnTo>
-                    <a:pt x="1244789" y="2388102"/>
+                    <a:pt x="1244789" y="2388101"/>
                   </a:lnTo>
                   <a:lnTo>
                     <a:pt x="1258174" y="2380031"/>
@@ -10997,7 +10997,7 @@
                     <a:pt x="1325098" y="2339170"/>
                   </a:lnTo>
                   <a:lnTo>
-                    <a:pt x="1338483" y="2330933"/>
+                    <a:pt x="1338483" y="2330932"/>
                   </a:lnTo>
                   <a:lnTo>
                     <a:pt x="1351868" y="2322677"/>
@@ -11060,7 +11060,7 @@
                     <a:pt x="1606179" y="2154127"/>
                   </a:lnTo>
                   <a:lnTo>
-                    <a:pt x="1619564" y="2143568"/>
+                    <a:pt x="1619564" y="2143567"/>
                   </a:lnTo>
                   <a:lnTo>
                     <a:pt x="1632949" y="2132716"/>
@@ -11087,7 +11087,7 @@
                     <a:pt x="1726643" y="2046719"/>
                   </a:lnTo>
                   <a:lnTo>
-                    <a:pt x="1740028" y="2032743"/>
+                    <a:pt x="1740028" y="2032742"/>
                   </a:lnTo>
                   <a:lnTo>
                     <a:pt x="1753413" y="2018365"/>
@@ -11111,7 +11111,7 @@
                     <a:pt x="1833722" y="1922204"/>
                   </a:lnTo>
                   <a:lnTo>
-                    <a:pt x="1847106" y="1904525"/>
+                    <a:pt x="1847106" y="1904524"/>
                   </a:lnTo>
                   <a:lnTo>
                     <a:pt x="1860491" y="1886446"/>
@@ -11135,7 +11135,7 @@
                     <a:pt x="1940800" y="1769084"/>
                   </a:lnTo>
                   <a:lnTo>
-                    <a:pt x="1954185" y="1748202"/>
+                    <a:pt x="1954185" y="1748201"/>
                   </a:lnTo>
                   <a:lnTo>
                     <a:pt x="1967570" y="1727033"/>
@@ -11150,7 +11150,7 @@
                     <a:pt x="2007724" y="1661741"/>
                   </a:lnTo>
                   <a:lnTo>
-                    <a:pt x="2021109" y="1639498"/>
+                    <a:pt x="2021109" y="1639497"/>
                   </a:lnTo>
                   <a:lnTo>
                     <a:pt x="2034494" y="1617055"/>
@@ -11189,7 +11189,7 @@
                     <a:pt x="2181727" y="1361273"/>
                   </a:lnTo>
                   <a:lnTo>
-                    <a:pt x="2195112" y="1337644"/>
+                    <a:pt x="2195112" y="1337643"/>
                   </a:lnTo>
                   <a:lnTo>
                     <a:pt x="2208497" y="1313992"/>
@@ -11204,7 +11204,7 @@
                     <a:pt x="2248651" y="1242996"/>
                   </a:lnTo>
                   <a:lnTo>
-                    <a:pt x="2262036" y="1219329"/>
+                    <a:pt x="2262036" y="1219328"/>
                   </a:lnTo>
                   <a:lnTo>
                     <a:pt x="2275421" y="1195665"/>
@@ -11282,7 +11282,7 @@
                     <a:pt x="2596657" y="646861"/>
                   </a:lnTo>
                   <a:lnTo>
-                    <a:pt x="2610042" y="626596"/>
+                    <a:pt x="2610042" y="626595"/>
                   </a:lnTo>
                   <a:lnTo>
                     <a:pt x="2623427" y="606774"/>
@@ -11378,7 +11378,7 @@
                     <a:pt x="3024972" y="310554"/>
                   </a:lnTo>
                   <a:lnTo>
-                    <a:pt x="3038357" y="308237"/>
+                    <a:pt x="3038357" y="308236"/>
                   </a:lnTo>
                   <a:lnTo>
                     <a:pt x="3051741" y="305949"/>
@@ -11558,7 +11558,7 @@
                     <a:pt x="3828062" y="77096"/>
                   </a:lnTo>
                   <a:lnTo>
-                    <a:pt x="3841447" y="89389"/>
+                    <a:pt x="3841447" y="89388"/>
                   </a:lnTo>
                   <a:lnTo>
                     <a:pt x="3854831" y="102646"/>
@@ -11660,7 +11660,7 @@
                     <a:pt x="4283146" y="780162"/>
                   </a:lnTo>
                   <a:lnTo>
-                    <a:pt x="4296531" y="804288"/>
+                    <a:pt x="4296531" y="804287"/>
                   </a:lnTo>
                   <a:lnTo>
                     <a:pt x="4309916" y="828306"/>
@@ -11711,7 +11711,7 @@
                     <a:pt x="4510688" y="1154510"/>
                   </a:lnTo>
                   <a:lnTo>
-                    <a:pt x="4524073" y="1172873"/>
+                    <a:pt x="4524073" y="1172872"/>
                   </a:lnTo>
                   <a:lnTo>
                     <a:pt x="4537458" y="1190775"/>
@@ -11720,7 +11720,7 @@
                     <a:pt x="4550843" y="1208004"/>
                   </a:lnTo>
                   <a:lnTo>
-                    <a:pt x="4564228" y="1224737"/>
+                    <a:pt x="4564228" y="1224736"/>
                   </a:lnTo>
                   <a:lnTo>
                     <a:pt x="4577612" y="1241004"/>
@@ -11768,7 +11768,7 @@
                     <a:pt x="4765000" y="1422798"/>
                   </a:lnTo>
                   <a:lnTo>
-                    <a:pt x="4778385" y="1433681"/>
+                    <a:pt x="4778385" y="1433680"/>
                   </a:lnTo>
                   <a:lnTo>
                     <a:pt x="4791770" y="1444493"/>
@@ -11792,7 +11792,7 @@
                     <a:pt x="4872079" y="1509926"/>
                   </a:lnTo>
                   <a:lnTo>
-                    <a:pt x="4885464" y="1521301"/>
+                    <a:pt x="4885464" y="1521300"/>
                   </a:lnTo>
                   <a:lnTo>
                     <a:pt x="4898848" y="1532871"/>
@@ -11849,7 +11849,7 @@
                     <a:pt x="5126391" y="1779593"/>
                   </a:lnTo>
                   <a:lnTo>
-                    <a:pt x="5139775" y="1797111"/>
+                    <a:pt x="5139775" y="1797110"/>
                   </a:lnTo>
                   <a:lnTo>
                     <a:pt x="5153160" y="1814830"/>
@@ -11864,7 +11864,7 @@
                     <a:pt x="5193315" y="1869099"/>
                   </a:lnTo>
                   <a:lnTo>
-                    <a:pt x="5206700" y="1887477"/>
+                    <a:pt x="5206700" y="1887476"/>
                   </a:lnTo>
                   <a:lnTo>
                     <a:pt x="5220084" y="1905935"/>
@@ -11873,10 +11873,10 @@
                     <a:pt x="5233469" y="1924457"/>
                   </a:lnTo>
                   <a:lnTo>
-                    <a:pt x="5246854" y="1943010"/>
-                  </a:lnTo>
-                  <a:lnTo>
-                    <a:pt x="5260239" y="1961548"/>
+                    <a:pt x="5246854" y="1943009"/>
+                  </a:lnTo>
+                  <a:lnTo>
+                    <a:pt x="5260239" y="1961547"/>
                   </a:lnTo>
                   <a:lnTo>
                     <a:pt x="5273624" y="1980052"/>
@@ -11915,7 +11915,7 @@
                     <a:pt x="5420857" y="2172337"/>
                   </a:lnTo>
                   <a:lnTo>
-                    <a:pt x="5434242" y="2188141"/>
+                    <a:pt x="5434242" y="2188140"/>
                   </a:lnTo>
                   <a:lnTo>
                     <a:pt x="5447627" y="2203583"/>
@@ -11975,7 +11975,7 @@
                     <a:pt x="5688554" y="2405267"/>
                   </a:lnTo>
                   <a:lnTo>
-                    <a:pt x="5701938" y="2412202"/>
+                    <a:pt x="5701938" y="2412201"/>
                   </a:lnTo>
                   <a:lnTo>
                     <a:pt x="5715323" y="2418709"/>
@@ -11990,7 +11990,7 @@
                     <a:pt x="5755478" y="2435694"/>
                   </a:lnTo>
                   <a:lnTo>
-                    <a:pt x="5768863" y="2440629"/>
+                    <a:pt x="5768863" y="2440628"/>
                   </a:lnTo>
                   <a:lnTo>
                     <a:pt x="5782247" y="2445134"/>
@@ -12014,7 +12014,7 @@
                     <a:pt x="5862556" y="2465892"/>
                   </a:lnTo>
                   <a:lnTo>
-                    <a:pt x="5875941" y="2468430"/>
+                    <a:pt x="5875941" y="2468429"/>
                   </a:lnTo>
                   <a:lnTo>
                     <a:pt x="5889326" y="2470713"/>
@@ -12068,7 +12068,7 @@
                     <a:pt x="6103483" y="2494230"/>
                   </a:lnTo>
                   <a:lnTo>
-                    <a:pt x="6116868" y="2495725"/>
+                    <a:pt x="6116868" y="2495724"/>
                   </a:lnTo>
                   <a:lnTo>
                     <a:pt x="6130253" y="2497288"/>
@@ -12083,13 +12083,13 @@
                     <a:pt x="6170408" y="2502549"/>
                   </a:lnTo>
                   <a:lnTo>
-                    <a:pt x="6183792" y="2504482"/>
+                    <a:pt x="6183792" y="2504481"/>
                   </a:lnTo>
                   <a:lnTo>
                     <a:pt x="6197177" y="2506521"/>
                   </a:lnTo>
                   <a:lnTo>
-                    <a:pt x="6210562" y="2508675"/>
+                    <a:pt x="6210562" y="2508674"/>
                   </a:lnTo>
                   <a:lnTo>
                     <a:pt x="6223947" y="2510914"/>
@@ -12125,7 +12125,7 @@
                     <a:pt x="6357795" y="2537548"/>
                   </a:lnTo>
                   <a:lnTo>
-                    <a:pt x="6371180" y="2540466"/>
+                    <a:pt x="6371180" y="2540465"/>
                   </a:lnTo>
                   <a:lnTo>
                     <a:pt x="6384565" y="2543388"/>
@@ -12134,7 +12134,7 @@
                     <a:pt x="6397950" y="2546309"/>
                   </a:lnTo>
                   <a:lnTo>
-                    <a:pt x="6411335" y="2549218"/>
+                    <a:pt x="6411335" y="2549217"/>
                   </a:lnTo>
                   <a:lnTo>
                     <a:pt x="6424719" y="2552099"/>
@@ -12146,7 +12146,7 @@
                     <a:pt x="6451489" y="2557767"/>
                   </a:lnTo>
                   <a:lnTo>
-                    <a:pt x="6464874" y="2560530"/>
+                    <a:pt x="6464874" y="2560529"/>
                   </a:lnTo>
                   <a:lnTo>
                     <a:pt x="6478259" y="2563227"/>
@@ -12161,13 +12161,13 @@
                     <a:pt x="6518413" y="2570936"/>
                   </a:lnTo>
                   <a:lnTo>
-                    <a:pt x="6531798" y="2573339"/>
+                    <a:pt x="6531798" y="2573338"/>
                   </a:lnTo>
                   <a:lnTo>
                     <a:pt x="6545183" y="2575665"/>
                   </a:lnTo>
                   <a:lnTo>
-                    <a:pt x="6558568" y="2577915"/>
+                    <a:pt x="6558568" y="2577914"/>
                   </a:lnTo>
                   <a:lnTo>
                     <a:pt x="6571953" y="2580062"/>
@@ -12182,7 +12182,7 @@
                     <a:pt x="6612107" y="2585964"/>
                   </a:lnTo>
                   <a:lnTo>
-                    <a:pt x="6625492" y="2587748"/>
+                    <a:pt x="6625492" y="2587747"/>
                   </a:lnTo>
                   <a:lnTo>
                     <a:pt x="6638877" y="2589437"/>
@@ -12224,7 +12224,7 @@
                     <a:pt x="6799495" y="2604434"/>
                   </a:lnTo>
                   <a:lnTo>
-                    <a:pt x="6812880" y="2605388"/>
+                    <a:pt x="6812880" y="2605387"/>
                   </a:lnTo>
                   <a:lnTo>
                     <a:pt x="6826264" y="2606321"/>
@@ -12572,7 +12572,7 @@
           </p:nvSpPr>
           <p:spPr>
             <a:xfrm>
-              <a:off x="714085" y="2854312"/>
+              <a:off x="714085" y="2854313"/>
               <a:ext cx="304860" cy="87416"/>
             </a:xfrm>
             <a:prstGeom prst="rect">
